--- a/docs/csa_store_application_overview_deck.pptx
+++ b/docs/csa_store_application_overview_deck.pptx
@@ -1883,14 +1883,14 @@
               <a:buNone/>
             </a:pPr>
             <a:r>
-              <a:rPr lang="en-US" sz="1700" dirty="0">
+              <a:rPr lang="en-US" sz="1800" dirty="0">
                 <a:solidFill>
                   <a:srgbClr val="FFFFFF"/>
                 </a:solidFill>
               </a:rPr>
               <a:t>What it does now, where it is going, and why it pays for itself</a:t>
             </a:r>
-            <a:endParaRPr lang="en-US" sz="1700" dirty="0"/>
+            <a:endParaRPr lang="en-US" sz="1800" dirty="0"/>
           </a:p>
         </p:txBody>
       </p:sp>
@@ -2028,7 +2028,7 @@
               <a:buChar char="•"/>
             </a:pPr>
             <a:r>
-              <a:rPr lang="en-US" sz="1600" dirty="0">
+              <a:rPr lang="en-US" sz="1800" dirty="0">
                 <a:solidFill>
                   <a:srgbClr val="21303A"/>
                 </a:solidFill>
@@ -2036,9 +2036,9 @@
                 <a:ea typeface="Aptos" pitchFamily="34" charset="-122"/>
                 <a:cs typeface="Aptos" pitchFamily="34" charset="-120"/>
               </a:rPr>
-              <a:t>Consolidate operations into one interface</a:t>
-            </a:r>
-            <a:endParaRPr lang="en-US" sz="1600" dirty="0"/>
+              <a:t>One interface</a:t>
+            </a:r>
+            <a:endParaRPr lang="en-US" sz="1800" dirty="0"/>
           </a:p>
           <a:p>
             <a:pPr marL="228600" indent="-228600">
@@ -2046,7 +2046,7 @@
               <a:buChar char="•"/>
             </a:pPr>
             <a:r>
-              <a:rPr lang="en-US" sz="1600" dirty="0">
+              <a:rPr lang="en-US" sz="1800" dirty="0">
                 <a:solidFill>
                   <a:srgbClr val="21303A"/>
                 </a:solidFill>
@@ -2054,9 +2054,9 @@
                 <a:ea typeface="Aptos" pitchFamily="34" charset="-122"/>
                 <a:cs typeface="Aptos" pitchFamily="34" charset="-120"/>
               </a:rPr>
-              <a:t>Improve subscriptions, pricing, analytics, and marketing control</a:t>
-            </a:r>
-            <a:endParaRPr lang="en-US" sz="1600" dirty="0"/>
+              <a:t>Better conversion</a:t>
+            </a:r>
+            <a:endParaRPr lang="en-US" sz="1800" dirty="0"/>
           </a:p>
           <a:p>
             <a:pPr marL="228600" indent="-228600">
@@ -2064,7 +2064,7 @@
               <a:buChar char="•"/>
             </a:pPr>
             <a:r>
-              <a:rPr lang="en-US" sz="1600" dirty="0">
+              <a:rPr lang="en-US" sz="1800" dirty="0">
                 <a:solidFill>
                   <a:srgbClr val="21303A"/>
                 </a:solidFill>
@@ -2072,9 +2072,9 @@
                 <a:ea typeface="Aptos" pitchFamily="34" charset="-122"/>
                 <a:cs typeface="Aptos" pitchFamily="34" charset="-120"/>
               </a:rPr>
-              <a:t>Build a platform the farm can actually own and steer</a:t>
-            </a:r>
-            <a:endParaRPr lang="en-US" sz="1600" dirty="0"/>
+              <a:t>Stronger control</a:t>
+            </a:r>
+            <a:endParaRPr lang="en-US" sz="1800" dirty="0"/>
           </a:p>
         </p:txBody>
       </p:sp>
@@ -2201,7 +2201,7 @@
               <a:buNone/>
             </a:pPr>
             <a:r>
-              <a:rPr lang="en-US" sz="2400" b="1" dirty="0">
+              <a:rPr lang="en-US" sz="2800" b="1" dirty="0">
                 <a:solidFill>
                   <a:srgbClr val="21303A"/>
                 </a:solidFill>
@@ -2211,7 +2211,7 @@
               </a:rPr>
               <a:t>Annual value summary</a:t>
             </a:r>
-            <a:endParaRPr lang="en-US" sz="2400" dirty="0"/>
+            <a:endParaRPr lang="en-US" sz="2800" dirty="0"/>
           </a:p>
         </p:txBody>
       </p:sp>
@@ -2240,14 +2240,14 @@
               <a:buNone/>
             </a:pPr>
             <a:r>
-              <a:rPr lang="en-US" sz="1100" i="1" dirty="0">
+              <a:rPr lang="en-US" sz="1000" i="1" dirty="0">
                 <a:solidFill>
                   <a:srgbClr val="46535D"/>
                 </a:solidFill>
               </a:rPr>
-              <a:t>Base ROI case before additional marketing upside.</a:t>
-            </a:r>
-            <a:endParaRPr lang="en-US" sz="1100" dirty="0"/>
+              <a:t>Base ROI before added marketing upside.</a:t>
+            </a:r>
+            <a:endParaRPr lang="en-US" sz="1000" dirty="0"/>
           </a:p>
         </p:txBody>
       </p:sp>
@@ -2540,7 +2540,7 @@
                   <a:srgbClr val="21303A"/>
                 </a:solidFill>
               </a:rPr>
-              <a:t>$28,800</a:t>
+              <a:t>$72,000</a:t>
             </a:r>
             <a:endParaRPr lang="en-US" sz="1200" dirty="0"/>
           </a:p>
@@ -2734,7 +2734,7 @@
                   <a:srgbClr val="21303A"/>
                 </a:solidFill>
               </a:rPr>
-              <a:t>&gt;$43,800</a:t>
+              <a:t>&gt;$87,000</a:t>
             </a:r>
             <a:endParaRPr lang="en-US" sz="1200" dirty="0"/>
           </a:p>
@@ -2936,7 +2936,7 @@
                   <a:srgbClr val="FFFFFF"/>
                 </a:solidFill>
               </a:rPr>
-              <a:t>&gt;$43.8K</a:t>
+              <a:t>&gt;$87K</a:t>
             </a:r>
             <a:endParaRPr lang="en-US" sz="2200" dirty="0"/>
           </a:p>
@@ -3037,7 +3037,7 @@
                   <a:srgbClr val="FFFFFF"/>
                 </a:solidFill>
               </a:rPr>
-              <a:t>&gt;8x</a:t>
+              <a:t>&gt;17x</a:t>
             </a:r>
             <a:endParaRPr lang="en-US" sz="2200" dirty="0"/>
           </a:p>
@@ -3202,7 +3202,7 @@
               <a:buNone/>
             </a:pPr>
             <a:r>
-              <a:rPr lang="en-US" sz="2400" b="1" dirty="0">
+              <a:rPr lang="en-US" sz="2800" b="1" dirty="0">
                 <a:solidFill>
                   <a:srgbClr val="21303A"/>
                 </a:solidFill>
@@ -3212,7 +3212,7 @@
               </a:rPr>
               <a:t>End goal</a:t>
             </a:r>
-            <a:endParaRPr lang="en-US" sz="2400" dirty="0"/>
+            <a:endParaRPr lang="en-US" sz="2800" dirty="0"/>
           </a:p>
         </p:txBody>
       </p:sp>
@@ -3241,14 +3241,14 @@
               <a:buNone/>
             </a:pPr>
             <a:r>
-              <a:rPr lang="en-US" sz="1100" i="1" dirty="0">
+              <a:rPr lang="en-US" sz="1000" i="1" dirty="0">
                 <a:solidFill>
                   <a:srgbClr val="46535D"/>
                 </a:solidFill>
               </a:rPr>
-              <a:t>Move from stitched-together operations to one controllable platform.</a:t>
-            </a:r>
-            <a:endParaRPr lang="en-US" sz="1100" dirty="0"/>
+              <a:t>One operating platform.</a:t>
+            </a:r>
+            <a:endParaRPr lang="en-US" sz="1000" dirty="0"/>
           </a:p>
         </p:txBody>
       </p:sp>
@@ -3278,7 +3278,7 @@
               <a:buChar char="•"/>
             </a:pPr>
             <a:r>
-              <a:rPr lang="en-US" sz="2000" dirty="0">
+              <a:rPr lang="en-US" sz="1800" dirty="0">
                 <a:solidFill>
                   <a:srgbClr val="21303A"/>
                 </a:solidFill>
@@ -3286,9 +3286,9 @@
                 <a:ea typeface="Aptos" pitchFamily="34" charset="-122"/>
                 <a:cs typeface="Aptos" pitchFamily="34" charset="-120"/>
               </a:rPr>
-              <a:t>Manage subscriptions, pricing, analytics, customer workflows, and marketing in one place.</a:t>
-            </a:r>
-            <a:endParaRPr lang="en-US" sz="2000" dirty="0"/>
+              <a:t>Run subscriptions, pricing, analytics, workflows, and marketing in one place</a:t>
+            </a:r>
+            <a:endParaRPr lang="en-US" sz="1800" dirty="0"/>
           </a:p>
           <a:p>
             <a:pPr marL="228600" indent="-228600">
@@ -3296,7 +3296,7 @@
               <a:buChar char="•"/>
             </a:pPr>
             <a:r>
-              <a:rPr lang="en-US" sz="2000" dirty="0">
+              <a:rPr lang="en-US" sz="1800" dirty="0">
                 <a:solidFill>
                   <a:srgbClr val="21303A"/>
                 </a:solidFill>
@@ -3304,9 +3304,9 @@
                 <a:ea typeface="Aptos" pitchFamily="34" charset="-122"/>
                 <a:cs typeface="Aptos" pitchFamily="34" charset="-120"/>
               </a:rPr>
-              <a:t>Reduce reliance on fragile handoffs between Wix, Zapier, scripts, Local Line, and Google Sheets.</a:t>
-            </a:r>
-            <a:endParaRPr lang="en-US" sz="2000" dirty="0"/>
+              <a:t>Reduce fragile handoffs</a:t>
+            </a:r>
+            <a:endParaRPr lang="en-US" sz="1800" dirty="0"/>
           </a:p>
           <a:p>
             <a:pPr marL="228600" indent="-228600">
@@ -3314,7 +3314,7 @@
               <a:buChar char="•"/>
             </a:pPr>
             <a:r>
-              <a:rPr lang="en-US" sz="2000" dirty="0">
+              <a:rPr lang="en-US" sz="1800" dirty="0">
                 <a:solidFill>
                   <a:srgbClr val="21303A"/>
                 </a:solidFill>
@@ -3322,9 +3322,9 @@
                 <a:ea typeface="Aptos" pitchFamily="34" charset="-122"/>
                 <a:cs typeface="Aptos" pitchFamily="34" charset="-120"/>
               </a:rPr>
-              <a:t>Give the farm a platform it can improve, own, and operate deliberately over time.</a:t>
-            </a:r>
-            <a:endParaRPr lang="en-US" sz="2000" dirty="0"/>
+              <a:t>Own the platform</a:t>
+            </a:r>
+            <a:endParaRPr lang="en-US" sz="1800" dirty="0"/>
           </a:p>
           <a:p>
             <a:pPr marL="228600" indent="-228600">
@@ -3332,7 +3332,7 @@
               <a:buChar char="•"/>
             </a:pPr>
             <a:r>
-              <a:rPr lang="en-US" sz="2000" dirty="0">
+              <a:rPr lang="en-US" sz="1800" dirty="0">
                 <a:solidFill>
                   <a:srgbClr val="21303A"/>
                 </a:solidFill>
@@ -3340,9 +3340,9 @@
                 <a:ea typeface="Aptos" pitchFamily="34" charset="-122"/>
                 <a:cs typeface="Aptos" pitchFamily="34" charset="-120"/>
               </a:rPr>
-              <a:t>Use Codex-assisted design and iteration to keep improving workflow and business intelligence instead of paying for fragmented fixes.</a:t>
-            </a:r>
-            <a:endParaRPr lang="en-US" sz="2000" dirty="0"/>
+              <a:t>Keep improving it with Codex-assisted iteration</a:t>
+            </a:r>
+            <a:endParaRPr lang="en-US" sz="1800" dirty="0"/>
           </a:p>
         </p:txBody>
       </p:sp>
@@ -3505,7 +3505,7 @@
               <a:buNone/>
             </a:pPr>
             <a:r>
-              <a:rPr lang="en-US" sz="2400" b="1" dirty="0">
+              <a:rPr lang="en-US" sz="2800" b="1" dirty="0">
                 <a:solidFill>
                   <a:srgbClr val="21303A"/>
                 </a:solidFill>
@@ -3515,7 +3515,7 @@
               </a:rPr>
               <a:t>Current situation</a:t>
             </a:r>
-            <a:endParaRPr lang="en-US" sz="2400" dirty="0"/>
+            <a:endParaRPr lang="en-US" sz="2800" dirty="0"/>
           </a:p>
         </p:txBody>
       </p:sp>
@@ -3544,14 +3544,14 @@
               <a:buNone/>
             </a:pPr>
             <a:r>
-              <a:rPr lang="en-US" sz="1100" i="1" dirty="0">
+              <a:rPr lang="en-US" sz="1000" i="1" dirty="0">
                 <a:solidFill>
                   <a:srgbClr val="46535D"/>
                 </a:solidFill>
               </a:rPr>
-              <a:t>Today’s workflow is spread across several systems and manual handoffs.</a:t>
-            </a:r>
-            <a:endParaRPr lang="en-US" sz="1100" dirty="0"/>
+              <a:t>Too many systems. Too many handoffs.</a:t>
+            </a:r>
+            <a:endParaRPr lang="en-US" sz="1000" dirty="0"/>
           </a:p>
         </p:txBody>
       </p:sp>
@@ -3581,7 +3581,7 @@
               <a:buChar char="•"/>
             </a:pPr>
             <a:r>
-              <a:rPr lang="en-US" sz="2000" dirty="0">
+              <a:rPr lang="en-US" sz="1800" dirty="0">
                 <a:solidFill>
                   <a:srgbClr val="21303A"/>
                 </a:solidFill>
@@ -3589,9 +3589,9 @@
                 <a:ea typeface="Aptos" pitchFamily="34" charset="-122"/>
                 <a:cs typeface="Aptos" pitchFamily="34" charset="-120"/>
               </a:rPr>
-              <a:t>Wix portal front-end and Wix CMS tables handle customer-facing pieces.</a:t>
-            </a:r>
-            <a:endParaRPr lang="en-US" sz="2000" dirty="0"/>
+              <a:t>Wix front-end and Wix CMS</a:t>
+            </a:r>
+            <a:endParaRPr lang="en-US" sz="1800" dirty="0"/>
           </a:p>
           <a:p>
             <a:pPr marL="228600" indent="-228600">
@@ -3599,7 +3599,7 @@
               <a:buChar char="•"/>
             </a:pPr>
             <a:r>
-              <a:rPr lang="en-US" sz="2000" dirty="0">
+              <a:rPr lang="en-US" sz="1800" dirty="0">
                 <a:solidFill>
                   <a:srgbClr val="21303A"/>
                 </a:solidFill>
@@ -3607,9 +3607,9 @@
                 <a:ea typeface="Aptos" pitchFamily="34" charset="-122"/>
                 <a:cs typeface="Aptos" pitchFamily="34" charset="-120"/>
               </a:rPr>
-              <a:t>Zapier hooks move data between tools.</a:t>
-            </a:r>
-            <a:endParaRPr lang="en-US" sz="2000" dirty="0"/>
+              <a:t>Zapier hooks</a:t>
+            </a:r>
+            <a:endParaRPr lang="en-US" sz="1800" dirty="0"/>
           </a:p>
           <a:p>
             <a:pPr marL="228600" indent="-228600">
@@ -3617,7 +3617,7 @@
               <a:buChar char="•"/>
             </a:pPr>
             <a:r>
-              <a:rPr lang="en-US" sz="2000" dirty="0">
+              <a:rPr lang="en-US" sz="1800" dirty="0">
                 <a:solidFill>
                   <a:srgbClr val="21303A"/>
                 </a:solidFill>
@@ -3625,9 +3625,9 @@
                 <a:ea typeface="Aptos" pitchFamily="34" charset="-122"/>
                 <a:cs typeface="Aptos" pitchFamily="34" charset="-120"/>
               </a:rPr>
-              <a:t>Local Line remains the core storefront backend.</a:t>
-            </a:r>
-            <a:endParaRPr lang="en-US" sz="2000" dirty="0"/>
+              <a:t>Local Line backend</a:t>
+            </a:r>
+            <a:endParaRPr lang="en-US" sz="1800" dirty="0"/>
           </a:p>
           <a:p>
             <a:pPr marL="228600" indent="-228600">
@@ -3635,7 +3635,7 @@
               <a:buChar char="•"/>
             </a:pPr>
             <a:r>
-              <a:rPr lang="en-US" sz="2000" dirty="0">
+              <a:rPr lang="en-US" sz="1800" dirty="0">
                 <a:solidFill>
                   <a:srgbClr val="21303A"/>
                 </a:solidFill>
@@ -3643,9 +3643,9 @@
                 <a:ea typeface="Aptos" pitchFamily="34" charset="-122"/>
                 <a:cs typeface="Aptos" pitchFamily="34" charset="-120"/>
               </a:rPr>
-              <a:t>Standalone Node.js scripts fill reporting and operational gaps.</a:t>
-            </a:r>
-            <a:endParaRPr lang="en-US" sz="2000" dirty="0"/>
+              <a:t>Standalone Node scripts</a:t>
+            </a:r>
+            <a:endParaRPr lang="en-US" sz="1800" dirty="0"/>
           </a:p>
           <a:p>
             <a:pPr marL="228600" indent="-228600">
@@ -3653,7 +3653,7 @@
               <a:buChar char="•"/>
             </a:pPr>
             <a:r>
-              <a:rPr lang="en-US" sz="2000" dirty="0">
+              <a:rPr lang="en-US" sz="1800" dirty="0">
                 <a:solidFill>
                   <a:srgbClr val="21303A"/>
                 </a:solidFill>
@@ -3661,9 +3661,9 @@
                 <a:ea typeface="Aptos" pitchFamily="34" charset="-122"/>
                 <a:cs typeface="Aptos" pitchFamily="34" charset="-120"/>
               </a:rPr>
-              <a:t>Google Sheets still carries part of the customer and operations load.</a:t>
-            </a:r>
-            <a:endParaRPr lang="en-US" sz="2000" dirty="0"/>
+              <a:t>Google Sheets for customer operations</a:t>
+            </a:r>
+            <a:endParaRPr lang="en-US" sz="1800" dirty="0"/>
           </a:p>
           <a:p>
             <a:pPr marL="228600" indent="-228600">
@@ -3671,7 +3671,7 @@
               <a:buChar char="•"/>
             </a:pPr>
             <a:r>
-              <a:rPr lang="en-US" sz="2000" dirty="0">
+              <a:rPr lang="en-US" sz="1800" dirty="0">
                 <a:solidFill>
                   <a:srgbClr val="21303A"/>
                 </a:solidFill>
@@ -3679,9 +3679,9 @@
                 <a:ea typeface="Aptos" pitchFamily="34" charset="-122"/>
                 <a:cs typeface="Aptos" pitchFamily="34" charset="-120"/>
               </a:rPr>
-              <a:t>Result: duplicated work, weaker attribution, brittle reporting, and slower changes.</a:t>
-            </a:r>
-            <a:endParaRPr lang="en-US" sz="2000" dirty="0"/>
+              <a:t>Result: duplicated work and weak reporting</a:t>
+            </a:r>
+            <a:endParaRPr lang="en-US" sz="1800" dirty="0"/>
           </a:p>
         </p:txBody>
       </p:sp>
@@ -4046,7 +4046,7 @@
               <a:buNone/>
             </a:pPr>
             <a:r>
-              <a:rPr lang="en-US" sz="2400" b="1" dirty="0">
+              <a:rPr lang="en-US" sz="2800" b="1" dirty="0">
                 <a:solidFill>
                   <a:srgbClr val="21303A"/>
                 </a:solidFill>
@@ -4056,7 +4056,7 @@
               </a:rPr>
               <a:t>What CSA Store does now</a:t>
             </a:r>
-            <a:endParaRPr lang="en-US" sz="2400" dirty="0"/>
+            <a:endParaRPr lang="en-US" sz="2800" dirty="0"/>
           </a:p>
         </p:txBody>
       </p:sp>
@@ -4085,14 +4085,14 @@
               <a:buNone/>
             </a:pPr>
             <a:r>
-              <a:rPr lang="en-US" sz="1100" i="1" dirty="0">
+              <a:rPr lang="en-US" sz="1000" i="1" dirty="0">
                 <a:solidFill>
                   <a:srgbClr val="46535D"/>
                 </a:solidFill>
               </a:rPr>
-              <a:t>The application already functions as an operating layer around Local Line, subscriptions, and reporting.</a:t>
-            </a:r>
-            <a:endParaRPr lang="en-US" sz="1100" dirty="0"/>
+              <a:t>The platform already acts as the operating layer.</a:t>
+            </a:r>
+            <a:endParaRPr lang="en-US" sz="1000" dirty="0"/>
           </a:p>
         </p:txBody>
       </p:sp>
@@ -4122,7 +4122,7 @@
               <a:buChar char="•"/>
             </a:pPr>
             <a:r>
-              <a:rPr lang="en-US" sz="2000" dirty="0">
+              <a:rPr lang="en-US" sz="1800" dirty="0">
                 <a:solidFill>
                   <a:srgbClr val="21303A"/>
                 </a:solidFill>
@@ -4130,9 +4130,9 @@
                 <a:ea typeface="Aptos" pitchFamily="34" charset="-122"/>
                 <a:cs typeface="Aptos" pitchFamily="34" charset="-120"/>
               </a:rPr>
-              <a:t>Pulls Local Line products, orders, fulfillments, and subscriber snapshots into one local admin.</a:t>
-            </a:r>
-            <a:endParaRPr lang="en-US" sz="2000" dirty="0"/>
+              <a:t>Pulls Local Line orders, products, fulfillments, and subscribers</a:t>
+            </a:r>
+            <a:endParaRPr lang="en-US" sz="1800" dirty="0"/>
           </a:p>
           <a:p>
             <a:pPr marL="228600" indent="-228600">
@@ -4140,7 +4140,7 @@
               <a:buChar char="•"/>
             </a:pPr>
             <a:r>
-              <a:rPr lang="en-US" sz="2000" dirty="0">
+              <a:rPr lang="en-US" sz="1800" dirty="0">
                 <a:solidFill>
                   <a:srgbClr val="21303A"/>
                 </a:solidFill>
@@ -4148,9 +4148,9 @@
                 <a:ea typeface="Aptos" pitchFamily="34" charset="-122"/>
                 <a:cs typeface="Aptos" pitchFamily="34" charset="-120"/>
               </a:rPr>
-              <a:t>Applies consistent pricing controls and formula-pricing rules from one place.</a:t>
-            </a:r>
-            <a:endParaRPr lang="en-US" sz="2000" dirty="0"/>
+              <a:t>Controls pricing from one place</a:t>
+            </a:r>
+            <a:endParaRPr lang="en-US" sz="1800" dirty="0"/>
           </a:p>
           <a:p>
             <a:pPr marL="228600" indent="-228600">
@@ -4158,7 +4158,7 @@
               <a:buChar char="•"/>
             </a:pPr>
             <a:r>
-              <a:rPr lang="en-US" sz="2000" dirty="0">
+              <a:rPr lang="en-US" sz="1800" dirty="0">
                 <a:solidFill>
                   <a:srgbClr val="21303A"/>
                 </a:solidFill>
@@ -4166,9 +4166,9 @@
                 <a:ea typeface="Aptos" pitchFamily="34" charset="-122"/>
                 <a:cs typeface="Aptos" pitchFamily="34" charset="-120"/>
               </a:rPr>
-              <a:t>Tracks drop-site performance, trends, and order behavior.</a:t>
-            </a:r>
-            <a:endParaRPr lang="en-US" sz="2000" dirty="0"/>
+              <a:t>Tracks drop-site performance</a:t>
+            </a:r>
+            <a:endParaRPr lang="en-US" sz="1800" dirty="0"/>
           </a:p>
           <a:p>
             <a:pPr marL="228600" indent="-228600">
@@ -4176,7 +4176,7 @@
               <a:buChar char="•"/>
             </a:pPr>
             <a:r>
-              <a:rPr lang="en-US" sz="2000" dirty="0">
+              <a:rPr lang="en-US" sz="1800" dirty="0">
                 <a:solidFill>
                   <a:srgbClr val="21303A"/>
                 </a:solidFill>
@@ -4184,9 +4184,9 @@
                 <a:ea typeface="Aptos" pitchFamily="34" charset="-122"/>
                 <a:cs typeface="Aptos" pitchFamily="34" charset="-120"/>
               </a:rPr>
-              <a:t>Publishes operational dashboards and Google outputs from local data.</a:t>
-            </a:r>
-            <a:endParaRPr lang="en-US" sz="2000" dirty="0"/>
+              <a:t>Publishes dashboards from local data</a:t>
+            </a:r>
+            <a:endParaRPr lang="en-US" sz="1800" dirty="0"/>
           </a:p>
           <a:p>
             <a:pPr marL="228600" indent="-228600">
@@ -4194,7 +4194,7 @@
               <a:buChar char="•"/>
             </a:pPr>
             <a:r>
-              <a:rPr lang="en-US" sz="2000" dirty="0">
+              <a:rPr lang="en-US" sz="1800" dirty="0">
                 <a:solidFill>
                   <a:srgbClr val="21303A"/>
                 </a:solidFill>
@@ -4202,9 +4202,9 @@
                 <a:ea typeface="Aptos" pitchFamily="34" charset="-122"/>
                 <a:cs typeface="Aptos" pitchFamily="34" charset="-120"/>
               </a:rPr>
-              <a:t>Runs a local subscribe page with lead capture, agreement handling, and nearest drop-site / home-delivery guidance.</a:t>
-            </a:r>
-            <a:endParaRPr lang="en-US" sz="2000" dirty="0"/>
+              <a:t>Runs a local subscribe page</a:t>
+            </a:r>
+            <a:endParaRPr lang="en-US" sz="1800" dirty="0"/>
           </a:p>
           <a:p>
             <a:pPr marL="228600" indent="-228600">
@@ -4212,7 +4212,7 @@
               <a:buChar char="•"/>
             </a:pPr>
             <a:r>
-              <a:rPr lang="en-US" sz="2000" dirty="0">
+              <a:rPr lang="en-US" sz="1800" dirty="0">
                 <a:solidFill>
                   <a:srgbClr val="21303A"/>
                 </a:solidFill>
@@ -4220,9 +4220,9 @@
                 <a:ea typeface="Aptos" pitchFamily="34" charset="-122"/>
                 <a:cs typeface="Aptos" pitchFamily="34" charset="-120"/>
               </a:rPr>
-              <a:t>Manages subscription leads in admin with status, notes, and signed records.</a:t>
-            </a:r>
-            <a:endParaRPr lang="en-US" sz="2000" dirty="0"/>
+              <a:t>Tracks subscription leads in admin</a:t>
+            </a:r>
+            <a:endParaRPr lang="en-US" sz="1800" dirty="0"/>
           </a:p>
         </p:txBody>
       </p:sp>
@@ -4385,7 +4385,7 @@
               <a:buNone/>
             </a:pPr>
             <a:r>
-              <a:rPr lang="en-US" sz="2400" b="1" dirty="0">
+              <a:rPr lang="en-US" sz="2800" b="1" dirty="0">
                 <a:solidFill>
                   <a:srgbClr val="21303A"/>
                 </a:solidFill>
@@ -4395,7 +4395,7 @@
               </a:rPr>
               <a:t>Why one interface matters</a:t>
             </a:r>
-            <a:endParaRPr lang="en-US" sz="2400" dirty="0"/>
+            <a:endParaRPr lang="en-US" sz="2800" dirty="0"/>
           </a:p>
         </p:txBody>
       </p:sp>
@@ -4424,14 +4424,14 @@
               <a:buNone/>
             </a:pPr>
             <a:r>
-              <a:rPr lang="en-US" sz="1100" i="1" dirty="0">
+              <a:rPr lang="en-US" sz="1000" i="1" dirty="0">
                 <a:solidFill>
                   <a:srgbClr val="46535D"/>
                 </a:solidFill>
               </a:rPr>
-              <a:t>Consolidation is not just cleaner architecture; it creates operating leverage.</a:t>
-            </a:r>
-            <a:endParaRPr lang="en-US" sz="1100" dirty="0"/>
+              <a:t>This is not just cleaner. It is more effective.</a:t>
+            </a:r>
+            <a:endParaRPr lang="en-US" sz="1000" dirty="0"/>
           </a:p>
         </p:txBody>
       </p:sp>
@@ -4461,7 +4461,7 @@
               <a:buChar char="•"/>
             </a:pPr>
             <a:r>
-              <a:rPr lang="en-US" sz="2000" dirty="0">
+              <a:rPr lang="en-US" sz="1800" dirty="0">
                 <a:solidFill>
                   <a:srgbClr val="21303A"/>
                 </a:solidFill>
@@ -4469,9 +4469,9 @@
                 <a:ea typeface="Aptos" pitchFamily="34" charset="-122"/>
                 <a:cs typeface="Aptos" pitchFamily="34" charset="-120"/>
               </a:rPr>
-              <a:t>One source of truth for pricing, subscriptions, analytics, and operations.</a:t>
-            </a:r>
-            <a:endParaRPr lang="en-US" sz="2000" dirty="0"/>
+              <a:t>One source of truth</a:t>
+            </a:r>
+            <a:endParaRPr lang="en-US" sz="1800" dirty="0"/>
           </a:p>
           <a:p>
             <a:pPr marL="228600" indent="-228600">
@@ -4479,7 +4479,7 @@
               <a:buChar char="•"/>
             </a:pPr>
             <a:r>
-              <a:rPr lang="en-US" sz="2000" dirty="0">
+              <a:rPr lang="en-US" sz="1800" dirty="0">
                 <a:solidFill>
                   <a:srgbClr val="21303A"/>
                 </a:solidFill>
@@ -4487,9 +4487,9 @@
                 <a:ea typeface="Aptos" pitchFamily="34" charset="-122"/>
                 <a:cs typeface="Aptos" pitchFamily="34" charset="-120"/>
               </a:rPr>
-              <a:t>Less reliance on Wix CMS tables, Zapier glue, standalone scripts, and Google Sheet workarounds.</a:t>
-            </a:r>
-            <a:endParaRPr lang="en-US" sz="2000" dirty="0"/>
+              <a:t>Less Wix, Zapier, script, and Sheet overhead</a:t>
+            </a:r>
+            <a:endParaRPr lang="en-US" sz="1800" dirty="0"/>
           </a:p>
           <a:p>
             <a:pPr marL="228600" indent="-228600">
@@ -4497,7 +4497,7 @@
               <a:buChar char="•"/>
             </a:pPr>
             <a:r>
-              <a:rPr lang="en-US" sz="2000" dirty="0">
+              <a:rPr lang="en-US" sz="1800" dirty="0">
                 <a:solidFill>
                   <a:srgbClr val="21303A"/>
                 </a:solidFill>
@@ -4505,9 +4505,9 @@
                 <a:ea typeface="Aptos" pitchFamily="34" charset="-122"/>
                 <a:cs typeface="Aptos" pitchFamily="34" charset="-120"/>
               </a:rPr>
-              <a:t>Faster changes because the team edits one application instead of coordinating several tools.</a:t>
-            </a:r>
-            <a:endParaRPr lang="en-US" sz="2000" dirty="0"/>
+              <a:t>Faster changes</a:t>
+            </a:r>
+            <a:endParaRPr lang="en-US" sz="1800" dirty="0"/>
           </a:p>
           <a:p>
             <a:pPr marL="228600" indent="-228600">
@@ -4515,7 +4515,7 @@
               <a:buChar char="•"/>
             </a:pPr>
             <a:r>
-              <a:rPr lang="en-US" sz="2000" dirty="0">
+              <a:rPr lang="en-US" sz="1800" dirty="0">
                 <a:solidFill>
                   <a:srgbClr val="21303A"/>
                 </a:solidFill>
@@ -4523,9 +4523,9 @@
                 <a:ea typeface="Aptos" pitchFamily="34" charset="-122"/>
                 <a:cs typeface="Aptos" pitchFamily="34" charset="-120"/>
               </a:rPr>
-              <a:t>Clearer control over pricing, customer conversion, reporting, and advertising efficiency.</a:t>
-            </a:r>
-            <a:endParaRPr lang="en-US" sz="2000" dirty="0"/>
+              <a:t>Better pricing control</a:t>
+            </a:r>
+            <a:endParaRPr lang="en-US" sz="1800" dirty="0"/>
           </a:p>
           <a:p>
             <a:pPr marL="228600" indent="-228600">
@@ -4533,7 +4533,7 @@
               <a:buChar char="•"/>
             </a:pPr>
             <a:r>
-              <a:rPr lang="en-US" sz="2000" dirty="0">
+              <a:rPr lang="en-US" sz="1800" dirty="0">
                 <a:solidFill>
                   <a:srgbClr val="21303A"/>
                 </a:solidFill>
@@ -4541,15 +4541,134 @@
                 <a:ea typeface="Aptos" pitchFamily="34" charset="-122"/>
                 <a:cs typeface="Aptos" pitchFamily="34" charset="-120"/>
               </a:rPr>
-              <a:t>A platform that can keep expanding instead of adding another side tool each time a gap appears.</a:t>
-            </a:r>
-            <a:endParaRPr lang="en-US" sz="2000" dirty="0"/>
-          </a:p>
-        </p:txBody>
-      </p:sp>
-      <p:sp>
-        <p:nvSpPr>
-          <p:cNvPr id="7" name="Text 5"/>
+              <a:t>Better conversion tracking</a:t>
+            </a:r>
+            <a:endParaRPr lang="en-US" sz="1800" dirty="0"/>
+          </a:p>
+          <a:p>
+            <a:pPr marL="228600" indent="-228600">
+              <a:buSzPct val="100000"/>
+              <a:buChar char="•"/>
+            </a:pPr>
+            <a:r>
+              <a:rPr lang="en-US" sz="1800" dirty="0">
+                <a:solidFill>
+                  <a:srgbClr val="21303A"/>
+                </a:solidFill>
+                <a:latin typeface="Aptos" pitchFamily="34" charset="0"/>
+                <a:ea typeface="Aptos" pitchFamily="34" charset="-122"/>
+                <a:cs typeface="Aptos" pitchFamily="34" charset="-120"/>
+              </a:rPr>
+              <a:t>Less manual work for Laura</a:t>
+            </a:r>
+            <a:endParaRPr lang="en-US" sz="1800" dirty="0"/>
+          </a:p>
+        </p:txBody>
+      </p:sp>
+      <p:sp>
+        <p:nvSpPr>
+          <p:cNvPr id="7" name="Shape 5"/>
+          <p:cNvSpPr/>
+          <p:nvPr/>
+        </p:nvSpPr>
+        <p:spPr>
+          <a:xfrm>
+            <a:off x="8138160" y="4572000"/>
+            <a:ext cx="2560320" cy="1005840"/>
+          </a:xfrm>
+          <a:prstGeom prst="roundRect">
+            <a:avLst>
+              <a:gd name="adj" fmla="val 7273"/>
+            </a:avLst>
+          </a:prstGeom>
+          <a:solidFill>
+            <a:srgbClr val="46535D"/>
+          </a:solidFill>
+          <a:ln w="12700">
+            <a:solidFill>
+              <a:srgbClr val="46535D">
+                <a:alpha val="0"/>
+              </a:srgbClr>
+            </a:solidFill>
+            <a:prstDash val="solid"/>
+          </a:ln>
+        </p:spPr>
+      </p:sp>
+      <p:sp>
+        <p:nvSpPr>
+          <p:cNvPr id="8" name="Text 6"/>
+          <p:cNvSpPr/>
+          <p:nvPr/>
+        </p:nvSpPr>
+        <p:spPr>
+          <a:xfrm>
+            <a:off x="8302752" y="4700016"/>
+            <a:ext cx="2231136" cy="182880"/>
+          </a:xfrm>
+          <a:prstGeom prst="rect">
+            <a:avLst/>
+          </a:prstGeom>
+          <a:noFill/>
+          <a:ln/>
+        </p:spPr>
+        <p:txBody>
+          <a:bodyPr wrap="square" lIns="0" tIns="0" rIns="0" bIns="0" rtlCol="0" anchor="ctr"/>
+          <a:lstStyle/>
+          <a:p>
+            <a:pPr indent="0" marL="0">
+              <a:buNone/>
+            </a:pPr>
+            <a:r>
+              <a:rPr lang="en-US" sz="1100" b="1" dirty="0">
+                <a:solidFill>
+                  <a:srgbClr val="FFFFFF"/>
+                </a:solidFill>
+              </a:rPr>
+              <a:t>Laura's time</a:t>
+            </a:r>
+            <a:endParaRPr lang="en-US" sz="1100" dirty="0"/>
+          </a:p>
+        </p:txBody>
+      </p:sp>
+      <p:sp>
+        <p:nvSpPr>
+          <p:cNvPr id="9" name="Text 7"/>
+          <p:cNvSpPr/>
+          <p:nvPr/>
+        </p:nvSpPr>
+        <p:spPr>
+          <a:xfrm>
+            <a:off x="8302752" y="4983480"/>
+            <a:ext cx="2231136" cy="502920"/>
+          </a:xfrm>
+          <a:prstGeom prst="rect">
+            <a:avLst/>
+          </a:prstGeom>
+          <a:noFill/>
+          <a:ln/>
+        </p:spPr>
+        <p:txBody>
+          <a:bodyPr wrap="square" lIns="0" tIns="0" rIns="0" bIns="0" rtlCol="0" anchor="ctr"/>
+          <a:lstStyle/>
+          <a:p>
+            <a:pPr indent="0" marL="0">
+              <a:buNone/>
+            </a:pPr>
+            <a:r>
+              <a:rPr lang="en-US" sz="2200" b="1" dirty="0">
+                <a:solidFill>
+                  <a:srgbClr val="FFFFFF"/>
+                </a:solidFill>
+              </a:rPr>
+              <a:t>Less admin friction</a:t>
+            </a:r>
+            <a:endParaRPr lang="en-US" sz="2200" dirty="0"/>
+          </a:p>
+        </p:txBody>
+      </p:sp>
+      <p:sp>
+        <p:nvSpPr>
+          <p:cNvPr id="10" name="Text 8"/>
           <p:cNvSpPr/>
           <p:nvPr/>
         </p:nvSpPr>
@@ -4706,7 +4825,7 @@
               <a:buNone/>
             </a:pPr>
             <a:r>
-              <a:rPr lang="en-US" sz="2400" b="1" dirty="0">
+              <a:rPr lang="en-US" sz="2800" b="1" dirty="0">
                 <a:solidFill>
                   <a:srgbClr val="21303A"/>
                 </a:solidFill>
@@ -4714,9 +4833,9 @@
                 <a:ea typeface="Aptos Display" pitchFamily="34" charset="-122"/>
                 <a:cs typeface="Aptos Display" pitchFamily="34" charset="-120"/>
               </a:rPr>
-              <a:t>What we want it to do next</a:t>
-            </a:r>
-            <a:endParaRPr lang="en-US" sz="2400" dirty="0"/>
+              <a:t>What we want next</a:t>
+            </a:r>
+            <a:endParaRPr lang="en-US" sz="2800" dirty="0"/>
           </a:p>
         </p:txBody>
       </p:sp>
@@ -4745,14 +4864,14 @@
               <a:buNone/>
             </a:pPr>
             <a:r>
-              <a:rPr lang="en-US" sz="1100" i="1" dirty="0">
+              <a:rPr lang="en-US" sz="1000" i="1" dirty="0">
                 <a:solidFill>
                   <a:srgbClr val="46535D"/>
                 </a:solidFill>
               </a:rPr>
-              <a:t>The goal is vertical control of the system on a DigitalOcean-hosted application.</a:t>
-            </a:r>
-            <a:endParaRPr lang="en-US" sz="1100" dirty="0"/>
+              <a:t>One vertically managed platform.</a:t>
+            </a:r>
+            <a:endParaRPr lang="en-US" sz="1000" dirty="0"/>
           </a:p>
         </p:txBody>
       </p:sp>
@@ -4782,7 +4901,7 @@
               <a:buChar char="•"/>
             </a:pPr>
             <a:r>
-              <a:rPr lang="en-US" sz="2000" dirty="0">
+              <a:rPr lang="en-US" sz="1800" dirty="0">
                 <a:solidFill>
                   <a:srgbClr val="21303A"/>
                 </a:solidFill>
@@ -4790,9 +4909,9 @@
                 <a:ea typeface="Aptos" pitchFamily="34" charset="-122"/>
                 <a:cs typeface="Aptos" pitchFamily="34" charset="-120"/>
               </a:rPr>
-              <a:t>Replace remaining stitched-together workflows with one interface.</a:t>
-            </a:r>
-            <a:endParaRPr lang="en-US" sz="2000" dirty="0"/>
+              <a:t>Replace the remaining stitched-together workflow</a:t>
+            </a:r>
+            <a:endParaRPr lang="en-US" sz="1800" dirty="0"/>
           </a:p>
           <a:p>
             <a:pPr marL="228600" indent="-228600">
@@ -4800,7 +4919,7 @@
               <a:buChar char="•"/>
             </a:pPr>
             <a:r>
-              <a:rPr lang="en-US" sz="2000" dirty="0">
+              <a:rPr lang="en-US" sz="1800" dirty="0">
                 <a:solidFill>
                   <a:srgbClr val="21303A"/>
                 </a:solidFill>
@@ -4808,9 +4927,9 @@
                 <a:ea typeface="Aptos" pitchFamily="34" charset="-122"/>
                 <a:cs typeface="Aptos" pitchFamily="34" charset="-120"/>
               </a:rPr>
-              <a:t>Make subscriptions more efficient: capture leads, match people to nearest drop site or delivery, and track status through conversion.</a:t>
-            </a:r>
-            <a:endParaRPr lang="en-US" sz="2000" dirty="0"/>
+              <a:t>Capture and convert subscription leads more efficiently</a:t>
+            </a:r>
+            <a:endParaRPr lang="en-US" sz="1800" dirty="0"/>
           </a:p>
           <a:p>
             <a:pPr marL="228600" indent="-228600">
@@ -4818,7 +4937,7 @@
               <a:buChar char="•"/>
             </a:pPr>
             <a:r>
-              <a:rPr lang="en-US" sz="2000" dirty="0">
+              <a:rPr lang="en-US" sz="1800" dirty="0">
                 <a:solidFill>
                   <a:srgbClr val="21303A"/>
                 </a:solidFill>
@@ -4826,9 +4945,9 @@
                 <a:ea typeface="Aptos" pitchFamily="34" charset="-122"/>
                 <a:cs typeface="Aptos" pitchFamily="34" charset="-120"/>
               </a:rPr>
-              <a:t>Add marketing attribution: campaigns, tracked links, subscriber source tracking, and location-aware analytics.</a:t>
-            </a:r>
-            <a:endParaRPr lang="en-US" sz="2000" dirty="0"/>
+              <a:t>Match members to nearest drop site or delivery</a:t>
+            </a:r>
+            <a:endParaRPr lang="en-US" sz="1800" dirty="0"/>
           </a:p>
           <a:p>
             <a:pPr marL="228600" indent="-228600">
@@ -4836,7 +4955,7 @@
               <a:buChar char="•"/>
             </a:pPr>
             <a:r>
-              <a:rPr lang="en-US" sz="2000" dirty="0">
+              <a:rPr lang="en-US" sz="1800" dirty="0">
                 <a:solidFill>
                   <a:srgbClr val="21303A"/>
                 </a:solidFill>
@@ -4844,9 +4963,9 @@
                 <a:ea typeface="Aptos" pitchFamily="34" charset="-122"/>
                 <a:cs typeface="Aptos" pitchFamily="34" charset="-120"/>
               </a:rPr>
-              <a:t>Add better member lifecycle tools for retention, communication, and cleaner customer records.</a:t>
-            </a:r>
-            <a:endParaRPr lang="en-US" sz="2000" dirty="0"/>
+              <a:t>Add campaign tracking and subscriber attribution</a:t>
+            </a:r>
+            <a:endParaRPr lang="en-US" sz="1800" dirty="0"/>
           </a:p>
           <a:p>
             <a:pPr marL="228600" indent="-228600">
@@ -4854,7 +4973,7 @@
               <a:buChar char="•"/>
             </a:pPr>
             <a:r>
-              <a:rPr lang="en-US" sz="2000" dirty="0">
+              <a:rPr lang="en-US" sz="1800" dirty="0">
                 <a:solidFill>
                   <a:srgbClr val="21303A"/>
                 </a:solidFill>
@@ -4862,9 +4981,27 @@
                 <a:ea typeface="Aptos" pitchFamily="34" charset="-122"/>
                 <a:cs typeface="Aptos" pitchFamily="34" charset="-120"/>
               </a:rPr>
-              <a:t>Use Codex-assisted design and iteration to improve the platform quickly without fragmenting the stack further.</a:t>
-            </a:r>
-            <a:endParaRPr lang="en-US" sz="2000" dirty="0"/>
+              <a:t>Add better retention and communication tools</a:t>
+            </a:r>
+            <a:endParaRPr lang="en-US" sz="1800" dirty="0"/>
+          </a:p>
+          <a:p>
+            <a:pPr marL="228600" indent="-228600">
+              <a:buSzPct val="100000"/>
+              <a:buChar char="•"/>
+            </a:pPr>
+            <a:r>
+              <a:rPr lang="en-US" sz="1800" dirty="0">
+                <a:solidFill>
+                  <a:srgbClr val="21303A"/>
+                </a:solidFill>
+                <a:latin typeface="Aptos" pitchFamily="34" charset="0"/>
+                <a:ea typeface="Aptos" pitchFamily="34" charset="-122"/>
+                <a:cs typeface="Aptos" pitchFamily="34" charset="-120"/>
+              </a:rPr>
+              <a:t>Run it on DigitalOcean with Codex-assisted iteration</a:t>
+            </a:r>
+            <a:endParaRPr lang="en-US" sz="1800" dirty="0"/>
           </a:p>
         </p:txBody>
       </p:sp>
@@ -5128,7 +5265,7 @@
               <a:buNone/>
             </a:pPr>
             <a:r>
-              <a:rPr lang="en-US" sz="2400" b="1" dirty="0">
+              <a:rPr lang="en-US" sz="2800" b="1" dirty="0">
                 <a:solidFill>
                   <a:srgbClr val="21303A"/>
                 </a:solidFill>
@@ -5138,7 +5275,7 @@
               </a:rPr>
               <a:t>ROI: direct cost savings</a:t>
             </a:r>
-            <a:endParaRPr lang="en-US" sz="2400" dirty="0"/>
+            <a:endParaRPr lang="en-US" sz="2800" dirty="0"/>
           </a:p>
         </p:txBody>
       </p:sp>
@@ -5167,14 +5304,14 @@
               <a:buNone/>
             </a:pPr>
             <a:r>
-              <a:rPr lang="en-US" sz="1100" i="1" dirty="0">
+              <a:rPr lang="en-US" sz="1000" i="1" dirty="0">
                 <a:solidFill>
                   <a:srgbClr val="46535D"/>
                 </a:solidFill>
               </a:rPr>
-              <a:t>The current tool stack carries recurring cost before counting lost efficiency.</a:t>
-            </a:r>
-            <a:endParaRPr lang="en-US" sz="1100" dirty="0"/>
+              <a:t>Savings begin before growth upside.</a:t>
+            </a:r>
+            <a:endParaRPr lang="en-US" sz="1000" dirty="0"/>
           </a:p>
         </p:txBody>
       </p:sp>
@@ -6061,7 +6198,108 @@
       </p:sp>
       <p:sp>
         <p:nvSpPr>
-          <p:cNvPr id="33" name="Text 31"/>
+          <p:cNvPr id="33" name="Shape 31"/>
+          <p:cNvSpPr/>
+          <p:nvPr/>
+        </p:nvSpPr>
+        <p:spPr>
+          <a:xfrm>
+            <a:off x="8732520" y="3749040"/>
+            <a:ext cx="2560320" cy="1005840"/>
+          </a:xfrm>
+          <a:prstGeom prst="roundRect">
+            <a:avLst>
+              <a:gd name="adj" fmla="val 7273"/>
+            </a:avLst>
+          </a:prstGeom>
+          <a:solidFill>
+            <a:srgbClr val="667042"/>
+          </a:solidFill>
+          <a:ln w="12700">
+            <a:solidFill>
+              <a:srgbClr val="667042">
+                <a:alpha val="0"/>
+              </a:srgbClr>
+            </a:solidFill>
+            <a:prstDash val="solid"/>
+          </a:ln>
+        </p:spPr>
+      </p:sp>
+      <p:sp>
+        <p:nvSpPr>
+          <p:cNvPr id="34" name="Text 32"/>
+          <p:cNvSpPr/>
+          <p:nvPr/>
+        </p:nvSpPr>
+        <p:spPr>
+          <a:xfrm>
+            <a:off x="8897112" y="3877056"/>
+            <a:ext cx="2231136" cy="182880"/>
+          </a:xfrm>
+          <a:prstGeom prst="rect">
+            <a:avLst/>
+          </a:prstGeom>
+          <a:noFill/>
+          <a:ln/>
+        </p:spPr>
+        <p:txBody>
+          <a:bodyPr wrap="square" lIns="0" tIns="0" rIns="0" bIns="0" rtlCol="0" anchor="ctr"/>
+          <a:lstStyle/>
+          <a:p>
+            <a:pPr indent="0" marL="0">
+              <a:buNone/>
+            </a:pPr>
+            <a:r>
+              <a:rPr lang="en-US" sz="1100" b="1" dirty="0">
+                <a:solidFill>
+                  <a:srgbClr val="FFFFFF"/>
+                </a:solidFill>
+              </a:rPr>
+              <a:t>Labor savings</a:t>
+            </a:r>
+            <a:endParaRPr lang="en-US" sz="1100" dirty="0"/>
+          </a:p>
+        </p:txBody>
+      </p:sp>
+      <p:sp>
+        <p:nvSpPr>
+          <p:cNvPr id="35" name="Text 33"/>
+          <p:cNvSpPr/>
+          <p:nvPr/>
+        </p:nvSpPr>
+        <p:spPr>
+          <a:xfrm>
+            <a:off x="8897112" y="4160520"/>
+            <a:ext cx="2231136" cy="502920"/>
+          </a:xfrm>
+          <a:prstGeom prst="rect">
+            <a:avLst/>
+          </a:prstGeom>
+          <a:noFill/>
+          <a:ln/>
+        </p:spPr>
+        <p:txBody>
+          <a:bodyPr wrap="square" lIns="0" tIns="0" rIns="0" bIns="0" rtlCol="0" anchor="ctr"/>
+          <a:lstStyle/>
+          <a:p>
+            <a:pPr indent="0" marL="0">
+              <a:buNone/>
+            </a:pPr>
+            <a:r>
+              <a:rPr lang="en-US" sz="2200" b="1" dirty="0">
+                <a:solidFill>
+                  <a:srgbClr val="FFFFFF"/>
+                </a:solidFill>
+              </a:rPr>
+              <a:t>Less manual work</a:t>
+            </a:r>
+            <a:endParaRPr lang="en-US" sz="2200" dirty="0"/>
+          </a:p>
+        </p:txBody>
+      </p:sp>
+      <p:sp>
+        <p:nvSpPr>
+          <p:cNvPr id="36" name="Text 34"/>
           <p:cNvSpPr/>
           <p:nvPr/>
         </p:nvSpPr>
@@ -6218,7 +6456,7 @@
               <a:buNone/>
             </a:pPr>
             <a:r>
-              <a:rPr lang="en-US" sz="2400" b="1" dirty="0">
+              <a:rPr lang="en-US" sz="2800" b="1" dirty="0">
                 <a:solidFill>
                   <a:srgbClr val="21303A"/>
                 </a:solidFill>
@@ -6226,9 +6464,9 @@
                 <a:ea typeface="Aptos Display" pitchFamily="34" charset="-122"/>
                 <a:cs typeface="Aptos Display" pitchFamily="34" charset="-120"/>
               </a:rPr>
-              <a:t>ROI: conversion and retention upside</a:t>
-            </a:r>
-            <a:endParaRPr lang="en-US" sz="2400" dirty="0"/>
+              <a:t>ROI: conversion and retention</a:t>
+            </a:r>
+            <a:endParaRPr lang="en-US" sz="2800" dirty="0"/>
           </a:p>
         </p:txBody>
       </p:sp>
@@ -6257,14 +6495,14 @@
               <a:buNone/>
             </a:pPr>
             <a:r>
-              <a:rPr lang="en-US" sz="1100" i="1" dirty="0">
+              <a:rPr lang="en-US" sz="1000" i="1" dirty="0">
                 <a:solidFill>
                   <a:srgbClr val="46535D"/>
                 </a:solidFill>
               </a:rPr>
-              <a:t>Better subscription tools create value even before marketing optimization.</a:t>
-            </a:r>
-            <a:endParaRPr lang="en-US" sz="1100" dirty="0"/>
+              <a:t>A better portal should grow members.</a:t>
+            </a:r>
+            <a:endParaRPr lang="en-US" sz="1000" dirty="0"/>
           </a:p>
         </p:txBody>
       </p:sp>
@@ -6294,7 +6532,7 @@
               <a:buChar char="•"/>
             </a:pPr>
             <a:r>
-              <a:rPr lang="en-US" sz="2000" dirty="0">
+              <a:rPr lang="en-US" sz="1800" dirty="0">
                 <a:solidFill>
                   <a:srgbClr val="21303A"/>
                 </a:solidFill>
@@ -6302,9 +6540,9 @@
                 <a:ea typeface="Aptos" pitchFamily="34" charset="-122"/>
                 <a:cs typeface="Aptos" pitchFamily="34" charset="-120"/>
               </a:rPr>
-              <a:t>Current assumption: about 150 members leave each year and about 150 new members come in.</a:t>
-            </a:r>
-            <a:endParaRPr lang="en-US" sz="2000" dirty="0"/>
+              <a:t>About 150 members leave each year</a:t>
+            </a:r>
+            <a:endParaRPr lang="en-US" sz="1800" dirty="0"/>
           </a:p>
           <a:p>
             <a:pPr marL="228600" indent="-228600">
@@ -6312,7 +6550,7 @@
               <a:buChar char="•"/>
             </a:pPr>
             <a:r>
-              <a:rPr lang="en-US" sz="2000" dirty="0">
+              <a:rPr lang="en-US" sz="1800" dirty="0">
                 <a:solidFill>
                   <a:srgbClr val="21303A"/>
                 </a:solidFill>
@@ -6320,9 +6558,9 @@
                 <a:ea typeface="Aptos" pitchFamily="34" charset="-122"/>
                 <a:cs typeface="Aptos" pitchFamily="34" charset="-120"/>
               </a:rPr>
-              <a:t>If better portal design and subscription tools improve new intake by 5% and retention by 5%, the business gains about 30 additional members per year.</a:t>
-            </a:r>
-            <a:endParaRPr lang="en-US" sz="2000" dirty="0"/>
+              <a:t>About 150 new members join each year</a:t>
+            </a:r>
+            <a:endParaRPr lang="en-US" sz="1800" dirty="0"/>
           </a:p>
           <a:p>
             <a:pPr marL="228600" indent="-228600">
@@ -6330,7 +6568,7 @@
               <a:buChar char="•"/>
             </a:pPr>
             <a:r>
-              <a:rPr lang="en-US" sz="2000" dirty="0">
+              <a:rPr lang="en-US" sz="1800" dirty="0">
                 <a:solidFill>
                   <a:srgbClr val="21303A"/>
                 </a:solidFill>
@@ -6338,9 +6576,27 @@
                 <a:ea typeface="Aptos" pitchFamily="34" charset="-122"/>
                 <a:cs typeface="Aptos" pitchFamily="34" charset="-120"/>
               </a:rPr>
-              <a:t>Estimated annual value of those 30 members: about $28,800.</a:t>
-            </a:r>
-            <a:endParaRPr lang="en-US" sz="2000" dirty="0"/>
+              <a:t>Better intake and retention can add about 30 members</a:t>
+            </a:r>
+            <a:endParaRPr lang="en-US" sz="1800" dirty="0"/>
+          </a:p>
+          <a:p>
+            <a:pPr marL="228600" indent="-228600">
+              <a:buSzPct val="100000"/>
+              <a:buChar char="•"/>
+            </a:pPr>
+            <a:r>
+              <a:rPr lang="en-US" sz="1800" dirty="0">
+                <a:solidFill>
+                  <a:srgbClr val="21303A"/>
+                </a:solidFill>
+                <a:latin typeface="Aptos" pitchFamily="34" charset="0"/>
+                <a:ea typeface="Aptos" pitchFamily="34" charset="-122"/>
+                <a:cs typeface="Aptos" pitchFamily="34" charset="-120"/>
+              </a:rPr>
+              <a:t>Estimated annual value: about $72,000</a:t>
+            </a:r>
+            <a:endParaRPr lang="en-US" sz="1800" dirty="0"/>
           </a:p>
         </p:txBody>
       </p:sp>
@@ -6540,7 +6796,7 @@
                   <a:srgbClr val="FFFFFF"/>
                 </a:solidFill>
               </a:rPr>
-              <a:t>$28.8K / year</a:t>
+              <a:t>$72K / year</a:t>
             </a:r>
             <a:endParaRPr lang="en-US" sz="2200" dirty="0"/>
           </a:p>
@@ -6576,7 +6832,7 @@
                   <a:srgbClr val="46535D"/>
                 </a:solidFill>
               </a:rPr>
-              <a:t>This includes the value of better customer conversion and reduced churn from a cleaner member experience.</a:t>
+              <a:t>This reflects both better conversion and better retention.</a:t>
             </a:r>
             <a:endParaRPr lang="en-US" sz="1100" dirty="0"/>
           </a:p>
@@ -6741,7 +6997,7 @@
               <a:buNone/>
             </a:pPr>
             <a:r>
-              <a:rPr lang="en-US" sz="2400" b="1" dirty="0">
+              <a:rPr lang="en-US" sz="2800" b="1" dirty="0">
                 <a:solidFill>
                   <a:srgbClr val="21303A"/>
                 </a:solidFill>
@@ -6749,9 +7005,9 @@
                 <a:ea typeface="Aptos Display" pitchFamily="34" charset="-122"/>
                 <a:cs typeface="Aptos Display" pitchFamily="34" charset="-120"/>
               </a:rPr>
-              <a:t>ROI: pricing and margin control</a:t>
-            </a:r>
-            <a:endParaRPr lang="en-US" sz="2400" dirty="0"/>
+              <a:t>ROI: pricing and margin</a:t>
+            </a:r>
+            <a:endParaRPr lang="en-US" sz="2800" dirty="0"/>
           </a:p>
         </p:txBody>
       </p:sp>
@@ -6780,14 +7036,14 @@
               <a:buNone/>
             </a:pPr>
             <a:r>
-              <a:rPr lang="en-US" sz="1100" i="1" dirty="0">
+              <a:rPr lang="en-US" sz="1000" i="1" dirty="0">
                 <a:solidFill>
                   <a:srgbClr val="46535D"/>
                 </a:solidFill>
               </a:rPr>
-              <a:t>Centralized pricing control creates profit leverage.</a:t>
-            </a:r>
-            <a:endParaRPr lang="en-US" sz="1100" dirty="0"/>
+              <a:t>Pricing control directly drives profit.</a:t>
+            </a:r>
+            <a:endParaRPr lang="en-US" sz="1000" dirty="0"/>
           </a:p>
         </p:txBody>
       </p:sp>
@@ -6817,7 +7073,7 @@
               <a:buChar char="•"/>
             </a:pPr>
             <a:r>
-              <a:rPr lang="en-US" sz="2000" dirty="0">
+              <a:rPr lang="en-US" sz="1800" dirty="0">
                 <a:solidFill>
                   <a:srgbClr val="21303A"/>
                 </a:solidFill>
@@ -6825,9 +7081,9 @@
                 <a:ea typeface="Aptos" pitchFamily="34" charset="-122"/>
                 <a:cs typeface="Aptos" pitchFamily="34" charset="-120"/>
               </a:rPr>
-              <a:t>The application already centralizes price controls instead of scattering them across side tools.</a:t>
-            </a:r>
-            <a:endParaRPr lang="en-US" sz="2000" dirty="0"/>
+              <a:t>Cleaner formula pricing</a:t>
+            </a:r>
+            <a:endParaRPr lang="en-US" sz="1800" dirty="0"/>
           </a:p>
           <a:p>
             <a:pPr marL="228600" indent="-228600">
@@ -6835,7 +7091,7 @@
               <a:buChar char="•"/>
             </a:pPr>
             <a:r>
-              <a:rPr lang="en-US" sz="2000" dirty="0">
+              <a:rPr lang="en-US" sz="1800" dirty="0">
                 <a:solidFill>
                   <a:srgbClr val="21303A"/>
                 </a:solidFill>
@@ -6843,9 +7099,9 @@
                 <a:ea typeface="Aptos" pitchFamily="34" charset="-122"/>
                 <a:cs typeface="Aptos" pitchFamily="34" charset="-120"/>
               </a:rPr>
-              <a:t>Better formula pricing, cleaner review, and less inconsistency improve margin discipline.</a:t>
-            </a:r>
-            <a:endParaRPr lang="en-US" sz="2000" dirty="0"/>
+              <a:t>Less inconsistency</a:t>
+            </a:r>
+            <a:endParaRPr lang="en-US" sz="1800" dirty="0"/>
           </a:p>
           <a:p>
             <a:pPr marL="228600" indent="-228600">
@@ -6853,7 +7109,7 @@
               <a:buChar char="•"/>
             </a:pPr>
             <a:r>
-              <a:rPr lang="en-US" sz="2000" dirty="0">
+              <a:rPr lang="en-US" sz="1800" dirty="0">
                 <a:solidFill>
                   <a:srgbClr val="21303A"/>
                 </a:solidFill>
@@ -6861,9 +7117,9 @@
                 <a:ea typeface="Aptos" pitchFamily="34" charset="-122"/>
                 <a:cs typeface="Aptos" pitchFamily="34" charset="-120"/>
               </a:rPr>
-              <a:t>Even a 2% improvement in markup management is estimated to produce more than $10,000 in annual net profit.</a:t>
-            </a:r>
-            <a:endParaRPr lang="en-US" sz="2000" dirty="0"/>
+              <a:t>Better review of margin decisions</a:t>
+            </a:r>
+            <a:endParaRPr lang="en-US" sz="1800" dirty="0"/>
           </a:p>
           <a:p>
             <a:pPr marL="228600" indent="-228600">
@@ -6871,7 +7127,7 @@
               <a:buChar char="•"/>
             </a:pPr>
             <a:r>
-              <a:rPr lang="en-US" sz="2000" dirty="0">
+              <a:rPr lang="en-US" sz="1800" dirty="0">
                 <a:solidFill>
                   <a:srgbClr val="21303A"/>
                 </a:solidFill>
@@ -6879,9 +7135,9 @@
                 <a:ea typeface="Aptos" pitchFamily="34" charset="-122"/>
                 <a:cs typeface="Aptos" pitchFamily="34" charset="-120"/>
               </a:rPr>
-              <a:t>This is not labor savings; it is direct operating value from better business control.</a:t>
-            </a:r>
-            <a:endParaRPr lang="en-US" sz="2000" dirty="0"/>
+              <a:t>A 2% markup improvement is worth more than $10K per year</a:t>
+            </a:r>
+            <a:endParaRPr lang="en-US" sz="1800" dirty="0"/>
           </a:p>
         </p:txBody>
       </p:sp>
@@ -7145,7 +7401,7 @@
               <a:buNone/>
             </a:pPr>
             <a:r>
-              <a:rPr lang="en-US" sz="2400" b="1" dirty="0">
+              <a:rPr lang="en-US" sz="2800" b="1" dirty="0">
                 <a:solidFill>
                   <a:srgbClr val="21303A"/>
                 </a:solidFill>
@@ -7153,9 +7409,9 @@
                 <a:ea typeface="Aptos Display" pitchFamily="34" charset="-122"/>
                 <a:cs typeface="Aptos Display" pitchFamily="34" charset="-120"/>
               </a:rPr>
-              <a:t>Marketing and attribution value</a:t>
-            </a:r>
-            <a:endParaRPr lang="en-US" sz="2400" dirty="0"/>
+              <a:t>Marketing and attribution</a:t>
+            </a:r>
+            <a:endParaRPr lang="en-US" sz="2800" dirty="0"/>
           </a:p>
         </p:txBody>
       </p:sp>
@@ -7184,14 +7440,14 @@
               <a:buNone/>
             </a:pPr>
             <a:r>
-              <a:rPr lang="en-US" sz="1100" i="1" dirty="0">
+              <a:rPr lang="en-US" sz="1000" i="1" dirty="0">
                 <a:solidFill>
                   <a:srgbClr val="46535D"/>
                 </a:solidFill>
               </a:rPr>
-              <a:t>The next phase is not just ad tracking; it is better allocation of spend and message.</a:t>
-            </a:r>
-            <a:endParaRPr lang="en-US" sz="1100" dirty="0"/>
+              <a:t>Spend should be guided by data.</a:t>
+            </a:r>
+            <a:endParaRPr lang="en-US" sz="1000" dirty="0"/>
           </a:p>
         </p:txBody>
       </p:sp>
@@ -7221,7 +7477,7 @@
               <a:buChar char="•"/>
             </a:pPr>
             <a:r>
-              <a:rPr lang="en-US" sz="2000" dirty="0">
+              <a:rPr lang="en-US" sz="1800" dirty="0">
                 <a:solidFill>
                   <a:srgbClr val="21303A"/>
                 </a:solidFill>
@@ -7229,9 +7485,9 @@
                 <a:ea typeface="Aptos" pitchFamily="34" charset="-122"/>
                 <a:cs typeface="Aptos" pitchFamily="34" charset="-120"/>
               </a:rPr>
-              <a:t>Today, campaign performance and subscriber attribution are weak because the stack is fragmented.</a:t>
-            </a:r>
-            <a:endParaRPr lang="en-US" sz="2000" dirty="0"/>
+              <a:t>Today, attribution is weak</a:t>
+            </a:r>
+            <a:endParaRPr lang="en-US" sz="1800" dirty="0"/>
           </a:p>
           <a:p>
             <a:pPr marL="228600" indent="-228600">
@@ -7239,7 +7495,7 @@
               <a:buChar char="•"/>
             </a:pPr>
             <a:r>
-              <a:rPr lang="en-US" sz="2000" dirty="0">
+              <a:rPr lang="en-US" sz="1800" dirty="0">
                 <a:solidFill>
                   <a:srgbClr val="21303A"/>
                 </a:solidFill>
@@ -7247,9 +7503,9 @@
                 <a:ea typeface="Aptos" pitchFamily="34" charset="-122"/>
                 <a:cs typeface="Aptos" pitchFamily="34" charset="-120"/>
               </a:rPr>
-              <a:t>The planned marketing module would connect campaigns, tracked links, subscriber capture, drop-site demand, and spend decisions.</a:t>
-            </a:r>
-            <a:endParaRPr lang="en-US" sz="2000" dirty="0"/>
+              <a:t>Future module connects campaigns, locations, subscriptions, and spend</a:t>
+            </a:r>
+            <a:endParaRPr lang="en-US" sz="1800" dirty="0"/>
           </a:p>
           <a:p>
             <a:pPr marL="228600" indent="-228600">
@@ -7257,7 +7513,7 @@
               <a:buChar char="•"/>
             </a:pPr>
             <a:r>
-              <a:rPr lang="en-US" sz="2000" dirty="0">
+              <a:rPr lang="en-US" sz="1800" dirty="0">
                 <a:solidFill>
                   <a:srgbClr val="21303A"/>
                 </a:solidFill>
@@ -7265,9 +7521,9 @@
                 <a:ea typeface="Aptos" pitchFamily="34" charset="-122"/>
                 <a:cs typeface="Aptos" pitchFamily="34" charset="-120"/>
               </a:rPr>
-              <a:t>This improves the ability to answer: where should we spend, which message belongs on which channel, and which locations are responding?</a:t>
-            </a:r>
-            <a:endParaRPr lang="en-US" sz="2000" dirty="0"/>
+              <a:t>That improves where to spend and what to promote</a:t>
+            </a:r>
+            <a:endParaRPr lang="en-US" sz="1800" dirty="0"/>
           </a:p>
           <a:p>
             <a:pPr marL="228600" indent="-228600">
@@ -7275,7 +7531,7 @@
               <a:buChar char="•"/>
             </a:pPr>
             <a:r>
-              <a:rPr lang="en-US" sz="2000" dirty="0">
+              <a:rPr lang="en-US" sz="1800" dirty="0">
                 <a:solidFill>
                   <a:srgbClr val="21303A"/>
                 </a:solidFill>
@@ -7283,9 +7539,9 @@
                 <a:ea typeface="Aptos" pitchFamily="34" charset="-122"/>
                 <a:cs typeface="Aptos" pitchFamily="34" charset="-120"/>
               </a:rPr>
-              <a:t>That value is real, but it is not included in the base ROI math here.</a:t>
-            </a:r>
-            <a:endParaRPr lang="en-US" sz="2000" dirty="0"/>
+              <a:t>This upside is not included in the base ROI math</a:t>
+            </a:r>
+            <a:endParaRPr lang="en-US" sz="1800" dirty="0"/>
           </a:p>
         </p:txBody>
       </p:sp>
